--- a/exports/04_stats_heavy.pptx
+++ b/exports/04_stats_heavy.pptx
@@ -502,7 +502,8 @@
           <a:p>
             <a:r>
               <a:rPr lang="en-US" dirty="0"/>
-              <a:t>Highlight our ARR growth and net retention.</a:t>
+              <a:t>Highlight our ARR growth and net retention.
+Source: 04_stats_heavy.pdf</a:t>
             </a:r>
             <a:endParaRPr lang="en-US" dirty="0"/>
           </a:p>
